--- a/_designs/deck/TransferHub-Full.pptx
+++ b/_designs/deck/TransferHub-Full.pptx
@@ -132,33 +132,33 @@
   <p:extLst>
     <p:ext uri="{521415D9-36F7-43E2-AB2F-B90AF26B5E84}">
       <p14:sectionLst xmlns:p14="http://schemas.microsoft.com/office/powerpoint/2010/main">
-        <p14:section name="Opening" id="{032201ba-e6d4-3057-0fce-10781fe04849}">
+        <p14:section name="Opening" id="{059a707d-8c7e-647f-4143-59476e4fde62}">
           <p14:sldIdLst>
             <p14:sldId id="256"/>
           </p14:sldIdLst>
         </p14:section>
-        <p14:section name="The problem" id="{f274cac2-fd9c-4b49-3dab-4ca982a1b899}">
+        <p14:section name="The problem" id="{d353e6e2-6a7c-e273-3fcd-84ac14e13349}">
           <p14:sldIdLst>
             <p14:sldId id="257"/>
             <p14:sldId id="258"/>
             <p14:sldId id="259"/>
           </p14:sldIdLst>
         </p14:section>
-        <p14:section name="The solution" id="{fe6a8c18-5c62-fa5e-c924-86996af493e0}">
+        <p14:section name="The solution" id="{73b5c2ea-cc0c-1381-af6a-c09c8891e241}">
           <p14:sldIdLst>
             <p14:sldId id="260"/>
             <p14:sldId id="261"/>
             <p14:sldId id="262"/>
           </p14:sldIdLst>
         </p14:section>
-        <p14:section name="Student journey" id="{6eaea25f-9aea-fb43-bdb7-9d5a1679219e}">
+        <p14:section name="Student journey" id="{222b063e-917c-f5bb-140f-0f5b2cf7800f}">
           <p14:sldIdLst>
             <p14:sldId id="263"/>
             <p14:sldId id="264"/>
             <p14:sldId id="265"/>
           </p14:sldIdLst>
         </p14:section>
-        <p14:section name="Staff and workflow" id="{105f3ad5-2d6c-6fb8-5a2c-d66856105089}">
+        <p14:section name="Staff and workflow" id="{670d6937-71fc-6eed-3c1a-748e8863f860}">
           <p14:sldIdLst>
             <p14:sldId id="266"/>
             <p14:sldId id="267"/>
@@ -166,7 +166,7 @@
             <p14:sldId id="269"/>
           </p14:sldIdLst>
         </p14:section>
-        <p14:section name="AI" id="{d818df35-b907-0c50-2bf3-49d1760ba2e7}">
+        <p14:section name="AI" id="{1155ef40-f6c7-f0b6-f1d7-7bd0edf57c80}">
           <p14:sldIdLst>
             <p14:sldId id="270"/>
             <p14:sldId id="271"/>
@@ -174,7 +174,7 @@
             <p14:sldId id="273"/>
           </p14:sldIdLst>
         </p14:section>
-        <p14:section name="Platform" id="{1c5c0522-0f95-1fef-9a68-a0f7a78c1645}">
+        <p14:section name="Platform" id="{77061315-5927-66de-1207-c6d4a8364731}">
           <p14:sldIdLst>
             <p14:sldId id="274"/>
             <p14:sldId id="275"/>
@@ -182,7 +182,7 @@
             <p14:sldId id="277"/>
           </p14:sldIdLst>
         </p14:section>
-        <p14:section name="Proof and next" id="{79fae1f9-a0ca-9ea7-538a-47308adfbd98}">
+        <p14:section name="Proof and next" id="{5d65ce3e-5642-94ff-62ae-6f4b6eefa25b}">
           <p14:sldIdLst>
             <p14:sldId id="278"/>
             <p14:sldId id="279"/>
@@ -1634,7 +1634,7 @@
           <a:p>
             <a:r>
               <a:rPr lang="en-US" dirty="0"/>
-              <a:t>Backtest: for each of 63 past decisions, hide it from the matcher and ask whether the right BU course is in its top 1 or top 3. Built-in rules only, no AI key. The same harness will score the AI matcher once a key exists.</a:t>
+              <a:t>Backtest: for each of 63 past decisions, hide it from the matcher and ask whether the right BU course is in its top 1 or top 3. Built-in rules engine, the floor any AI provider must beat. The same harness and the Benchmark tab score Azure OpenAI and Anthropic.</a:t>
             </a:r>
             <a:endParaRPr lang="en-US" dirty="0"/>
           </a:p>
@@ -2338,7 +2338,7 @@
           <a:p>
             <a:r>
               <a:rPr lang="en-US" dirty="0"/>
-              <a:t>No live AI key, no BU baseline numbers. Plan to close the gaps.</a:t>
+              <a:t>No published AI accuracy yet, no BU baseline numbers. Plan to close the gaps.</a:t>
             </a:r>
             <a:endParaRPr lang="en-US" dirty="0"/>
           </a:p>
@@ -8839,7 +8839,7 @@
                   <a:srgbClr val="FFFFFF"/>
                 </a:solidFill>
               </a:rPr>
-              <a:t>Claude (direct API), Azure OpenAI or any OpenAI-compatible service for matching; Azure Document Intelligence for reading. Cheap model first, escalates only when unsure.</a:t>
+              <a:t>Azure OpenAI via Azure AI Foundry (in use) and Anthropic Claude (configured); any OpenAI-compatible service can be added when required. Azure Document Intelligence for reading. Cheap model first, escalates only when unsure.</a:t>
             </a:r>
             <a:endParaRPr lang="en-US" sz="1900" dirty="0"/>
           </a:p>
@@ -9165,7 +9165,7 @@
                   <a:srgbClr val="770816"/>
                 </a:solidFill>
               </a:rPr>
-              <a:t>Honest status: no Anthropic key yet, so the AI paths are built but not verified live. The rules engine runs every AI step today.</a:t>
+              <a:t>In use today: Azure OpenAI through Azure AI Foundry. Anthropic is also configured, and providers can be switched or added when required.</a:t>
             </a:r>
             <a:endParaRPr lang="en-US" sz="1400" dirty="0"/>
           </a:p>
@@ -10537,7 +10537,7 @@
                   <a:srgbClr val="2B1A1D"/>
                 </a:solidFill>
               </a:rPr>
-              <a:t>Built-in rules matcher (zero tokens). No AI accuracy is claimed: the AI matcher has not run live yet.</a:t>
+              <a:t>Built-in rules matcher (zero tokens). No AI accuracy figure is claimed yet; live AI runs on Azure OpenAI and will be scored with the same harness.</a:t>
             </a:r>
             <a:endParaRPr lang="en-US" sz="1500" dirty="0"/>
           </a:p>
@@ -17490,7 +17490,7 @@
                   <a:srgbClr val="2B1A1D"/>
                 </a:solidFill>
               </a:rPr>
-              <a:t>No Anthropic key yet: AI matching and reading are built but unverified live; the rules fallback carries the demo</a:t>
+              <a:t>AI accuracy not published yet: live AI runs on Azure OpenAI (Azure AI Foundry), Anthropic is configured, neither has been scored with the backtest</a:t>
             </a:r>
             <a:endParaRPr lang="en-US" sz="1500" dirty="0"/>
           </a:p>
@@ -17692,7 +17692,7 @@
                   <a:srgbClr val="2B1A1D"/>
                 </a:solidFill>
               </a:rPr>
-              <a:t>Get the Anthropic key; re-run the same backtest</a:t>
+              <a:t>Score Azure OpenAI and Anthropic with the same backtest</a:t>
             </a:r>
             <a:endParaRPr lang="en-US" sz="1500" dirty="0"/>
           </a:p>
